--- a/docs/sponsor-deck.pptx
+++ b/docs/sponsor-deck.pptx
@@ -1674,7 +1674,7 @@
                 <a:ea typeface="Calibri" pitchFamily="34" charset="-122"/>
                 <a:cs typeface="Calibri" pitchFamily="34" charset="-120"/>
               </a:rPr>
-              <a:t>wausaupilotandreview.com   ·   sales@wausaupilotandreview.com</a:t>
+              <a:t>wausaupilotandreview.com   ·   weber.chris@wausaupilotandreview.com</a:t>
             </a:r>
             <a:endParaRPr lang="en-US" sz="1050" dirty="0"/>
           </a:p>
@@ -1702,7 +1702,7 @@
       </p:sp>
       <p:pic>
         <p:nvPicPr>
-          <p:cNvPr id="7" name="Image 0" descr="/home/user/wpr-packers-tracker/public/og-card.png">    </p:cNvPr>
+          <p:cNvPr id="7" name="Image 0" descr="C:\Users\rpfly\Projects\wpr-packers-tracker\public\og-card.png">    </p:cNvPr>
           <p:cNvPicPr>
             <a:picLocks noChangeAspect="1"/>
           </p:cNvPicPr>
@@ -4251,7 +4251,7 @@
                 <a:ea typeface="Calibri" pitchFamily="34" charset="-122"/>
                 <a:cs typeface="Calibri" pitchFamily="34" charset="-120"/>
               </a:rPr>
-              <a:t>Where to watch · venue listing</a:t>
+              <a:t>Game-day guide · venue listings</a:t>
             </a:r>
             <a:endParaRPr lang="en-US" sz="850" dirty="0"/>
           </a:p>
@@ -4547,7 +4547,7 @@
                 <a:ea typeface="Calibri" pitchFamily="34" charset="-122"/>
                 <a:cs typeface="Calibri" pitchFamily="34" charset="-120"/>
               </a:rPr>
-              <a:t>Banner lockup + hero credit + email digest logo + calendar credit</a:t>
+              <a:t>Banner lockup + hero credit + email digest logo</a:t>
             </a:r>
             <a:endParaRPr lang="en-US" sz="950" dirty="0"/>
           </a:p>
@@ -5180,7 +5180,7 @@
                 <a:ea typeface="Calibri" pitchFamily="34" charset="-122"/>
                 <a:cs typeface="Calibri" pitchFamily="34" charset="-120"/>
               </a:rPr>
-              <a:t>Where to watch</a:t>
+              <a:t>Game-day guide</a:t>
             </a:r>
             <a:endParaRPr lang="en-US" sz="1200" dirty="0"/>
           </a:p>
@@ -5219,7 +5219,7 @@
                 <a:ea typeface="Calibri" pitchFamily="34" charset="-122"/>
                 <a:cs typeface="Calibri" pitchFamily="34" charset="-120"/>
               </a:rPr>
-              <a:t>A full venue listing: photo, amenities, game-day specials</a:t>
+              <a:t>Venue listings sold per listing: photos, amenity chips, game-day specials</a:t>
             </a:r>
             <a:endParaRPr lang="en-US" sz="950" dirty="0"/>
           </a:p>
@@ -5431,7 +5431,7 @@
         <p:spPr>
           <a:xfrm>
             <a:off x="493776" y="1298448"/>
-            <a:ext cx="4992624" cy="1694434"/>
+            <a:ext cx="4992624" cy="1608277"/>
           </a:xfrm>
           <a:prstGeom prst="rect">
             <a:avLst/>
@@ -5456,7 +5456,7 @@
       </p:sp>
       <p:pic>
         <p:nvPicPr>
-          <p:cNvPr id="5" name="Image 0" descr="/home/user/wpr-packers-tracker/docs/media/banner-demo.png">    </p:cNvPr>
+          <p:cNvPr id="5" name="Image 0" descr="C:\Users\rpfly\Projects\wpr-packers-tracker\docs\media\banner-demo.png">    </p:cNvPr>
           <p:cNvPicPr>
             <a:picLocks noChangeAspect="1"/>
           </p:cNvPicPr>
@@ -5471,7 +5471,7 @@
         <p:spPr>
           <a:xfrm>
             <a:off x="566928" y="1371600"/>
-            <a:ext cx="4846320" cy="1548130"/>
+            <a:ext cx="4846320" cy="1461973"/>
           </a:xfrm>
           <a:prstGeom prst="rect">
             <a:avLst/>
@@ -5487,7 +5487,7 @@
         <p:spPr>
           <a:xfrm>
             <a:off x="493776" y="3035808"/>
-            <a:ext cx="4306824" cy="1939632"/>
+            <a:ext cx="4306824" cy="1934337"/>
           </a:xfrm>
           <a:prstGeom prst="rect">
             <a:avLst/>
@@ -5512,7 +5512,7 @@
       </p:sp>
       <p:pic>
         <p:nvPicPr>
-          <p:cNvPr id="7" name="Image 1" descr="/home/user/wpr-packers-tracker/docs/media/hero.png">    </p:cNvPr>
+          <p:cNvPr id="7" name="Image 1" descr="C:\Users\rpfly\Projects\wpr-packers-tracker\docs\media\hero.png">    </p:cNvPr>
           <p:cNvPicPr>
             <a:picLocks noChangeAspect="1"/>
           </p:cNvPicPr>
@@ -5527,7 +5527,7 @@
         <p:spPr>
           <a:xfrm>
             <a:off x="566928" y="3108960"/>
-            <a:ext cx="4160520" cy="1793328"/>
+            <a:ext cx="4160520" cy="1788033"/>
           </a:xfrm>
           <a:prstGeom prst="rect">
             <a:avLst/>
@@ -5543,7 +5543,7 @@
         <p:spPr>
           <a:xfrm>
             <a:off x="5916168" y="1298448"/>
-            <a:ext cx="2478024" cy="1822922"/>
+            <a:ext cx="2478024" cy="1834025"/>
           </a:xfrm>
           <a:prstGeom prst="rect">
             <a:avLst/>
@@ -5568,7 +5568,7 @@
       </p:sp>
       <p:pic>
         <p:nvPicPr>
-          <p:cNvPr id="9" name="Image 2" descr="/home/user/wpr-packers-tracker/docs/media/mini-digest.png">    </p:cNvPr>
+          <p:cNvPr id="9" name="Image 2" descr="C:\Users\rpfly\Projects\wpr-packers-tracker\docs\media\mini-digest.png">    </p:cNvPr>
           <p:cNvPicPr>
             <a:picLocks noChangeAspect="1"/>
           </p:cNvPicPr>
@@ -5583,7 +5583,7 @@
         <p:spPr>
           <a:xfrm>
             <a:off x="5989320" y="1371600"/>
-            <a:ext cx="2331720" cy="1676618"/>
+            <a:ext cx="2331720" cy="1687721"/>
           </a:xfrm>
           <a:prstGeom prst="rect">
             <a:avLst/>
@@ -6273,7 +6273,7 @@
       </p:sp>
       <p:pic>
         <p:nvPicPr>
-          <p:cNvPr id="21" name="Image 4" descr="/home/user/wpr-packers-tracker/public/og-card.png">    </p:cNvPr>
+          <p:cNvPr id="21" name="Image 4" descr="C:\Users\rpfly\Projects\wpr-packers-tracker\public\og-card.png">    </p:cNvPr>
           <p:cNvPicPr>
             <a:picLocks noChangeAspect="1"/>
           </p:cNvPicPr>
@@ -7451,7 +7451,7 @@
                 <a:ea typeface="Calibri" pitchFamily="34" charset="-122"/>
                 <a:cs typeface="Calibri" pitchFamily="34" charset="-120"/>
               </a:rPr>
-              <a:t>sales@wausaupilotandreview.com</a:t>
+              <a:t>weber.chris@wausaupilotandreview.com</a:t>
             </a:r>
             <a:endParaRPr lang="en-US" sz="1400" dirty="0"/>
           </a:p>

--- a/docs/sponsor-deck.pptx
+++ b/docs/sponsor-deck.pptx
@@ -5431,7 +5431,7 @@
         <p:spPr>
           <a:xfrm>
             <a:off x="493776" y="1298448"/>
-            <a:ext cx="4992624" cy="1608277"/>
+            <a:ext cx="4992624" cy="1761744"/>
           </a:xfrm>
           <a:prstGeom prst="rect">
             <a:avLst/>
@@ -5471,7 +5471,7 @@
         <p:spPr>
           <a:xfrm>
             <a:off x="566928" y="1371600"/>
-            <a:ext cx="4846320" cy="1461973"/>
+            <a:ext cx="4846320" cy="1615440"/>
           </a:xfrm>
           <a:prstGeom prst="rect">
             <a:avLst/>

--- a/docs/sponsor-deck.pptx
+++ b/docs/sponsor-deck.pptx
@@ -5543,7 +5543,7 @@
         <p:spPr>
           <a:xfrm>
             <a:off x="5916168" y="1298448"/>
-            <a:ext cx="2478024" cy="1834025"/>
+            <a:ext cx="2478024" cy="1639715"/>
           </a:xfrm>
           <a:prstGeom prst="rect">
             <a:avLst/>
@@ -5583,7 +5583,7 @@
         <p:spPr>
           <a:xfrm>
             <a:off x="5989320" y="1371600"/>
-            <a:ext cx="2331720" cy="1687721"/>
+            <a:ext cx="2331720" cy="1493411"/>
           </a:xfrm>
           <a:prstGeom prst="rect">
             <a:avLst/>

--- a/docs/sponsor-deck.pptx
+++ b/docs/sponsor-deck.pptx
@@ -5431,7 +5431,7 @@
         <p:spPr>
           <a:xfrm>
             <a:off x="493776" y="1298448"/>
-            <a:ext cx="4992624" cy="1761744"/>
+            <a:ext cx="4992624" cy="1842516"/>
           </a:xfrm>
           <a:prstGeom prst="rect">
             <a:avLst/>
@@ -5471,7 +5471,7 @@
         <p:spPr>
           <a:xfrm>
             <a:off x="566928" y="1371600"/>
-            <a:ext cx="4846320" cy="1615440"/>
+            <a:ext cx="4846320" cy="1696212"/>
           </a:xfrm>
           <a:prstGeom prst="rect">
             <a:avLst/>
@@ -5543,7 +5543,7 @@
         <p:spPr>
           <a:xfrm>
             <a:off x="5916168" y="1298448"/>
-            <a:ext cx="2478024" cy="1639715"/>
+            <a:ext cx="2478024" cy="1667474"/>
           </a:xfrm>
           <a:prstGeom prst="rect">
             <a:avLst/>
@@ -5583,7 +5583,7 @@
         <p:spPr>
           <a:xfrm>
             <a:off x="5989320" y="1371600"/>
-            <a:ext cx="2331720" cy="1493411"/>
+            <a:ext cx="2331720" cy="1521170"/>
           </a:xfrm>
           <a:prstGeom prst="rect">
             <a:avLst/>
